--- a/templates/Advisor_Profile_Template_DocGen.pptx
+++ b/templates/Advisor_Profile_Template_DocGen.pptx
@@ -1942,7 +1942,7 @@
         </p:spPr>
         <p:txBody>
           <a:bodyPr spcFirstLastPara="1" wrap="square" lIns="0" tIns="53975" rIns="0" bIns="0" anchor="t" anchorCtr="0">
-            <a:spAutoFit/>
+            <a:normAutofit/>
           </a:bodyPr>
           <a:lstStyle/>
           <a:p>
@@ -2015,7 +2015,7 @@
         </p:spPr>
         <p:txBody>
           <a:bodyPr spcFirstLastPara="1" wrap="square" lIns="0" tIns="0" rIns="0" bIns="0" anchor="t" anchorCtr="0">
-            <a:spAutoFit/>
+            <a:normAutofit/>
           </a:bodyPr>
           <a:lstStyle/>
           <a:p>
@@ -2094,7 +2094,7 @@
         </p:spPr>
         <p:txBody>
           <a:bodyPr wrap="square" lIns="0" tIns="0" rIns="0" bIns="0">
-            <a:spAutoFit/>
+            <a:normAutofit/>
           </a:bodyPr>
           <a:lstStyle/>
           <a:p>
@@ -2169,7 +2169,7 @@
         </p:spPr>
         <p:txBody>
           <a:bodyPr spcFirstLastPara="1" wrap="square" lIns="0" tIns="0" rIns="0" bIns="0" anchor="t" anchorCtr="0">
-            <a:spAutoFit/>
+            <a:normAutofit/>
           </a:bodyPr>
           <a:lstStyle/>
           <a:p>
@@ -2253,7 +2253,7 @@
         </p:spPr>
         <p:txBody>
           <a:bodyPr spcFirstLastPara="1" wrap="square" lIns="0" tIns="0" rIns="0" bIns="0" anchor="t" anchorCtr="0">
-            <a:spAutoFit/>
+            <a:normAutofit/>
           </a:bodyPr>
           <a:lstStyle/>
           <a:p>
@@ -2314,7 +2314,7 @@
         </p:spPr>
         <p:txBody>
           <a:bodyPr spcFirstLastPara="1" wrap="square" lIns="0" tIns="0" rIns="0" bIns="0" anchor="t" anchorCtr="0">
-            <a:spAutoFit/>
+            <a:normAutofit/>
           </a:bodyPr>
           <a:lstStyle/>
           <a:p>
@@ -2542,7 +2542,7 @@
         </p:spPr>
         <p:txBody>
           <a:bodyPr spcFirstLastPara="1" wrap="square" lIns="0" tIns="0" rIns="0" bIns="0" anchor="t" anchorCtr="0">
-            <a:spAutoFit/>
+            <a:normAutofit/>
           </a:bodyPr>
           <a:lstStyle/>
           <a:p>
@@ -2685,7 +2685,7 @@
         </p:spPr>
         <p:txBody>
           <a:bodyPr wrap="square" lIns="0" tIns="0" rIns="0" bIns="0" rtlCol="0" anchor="t" anchorCtr="0">
-            <a:noAutofit/>
+            <a:normAutofit/>
           </a:bodyPr>
           <a:lstStyle/>
           <a:p>
@@ -2752,7 +2752,7 @@
         </p:spPr>
         <p:txBody>
           <a:bodyPr wrap="square" lIns="0" tIns="0" rIns="0" bIns="0" rtlCol="0">
-            <a:noAutofit/>
+            <a:normAutofit/>
           </a:bodyPr>
           <a:lstStyle/>
           <a:p>

--- a/templates/Advisor_Profile_Template_DocGen.pptx
+++ b/templates/Advisor_Profile_Template_DocGen.pptx
@@ -2314,7 +2314,7 @@
         </p:spPr>
         <p:txBody>
           <a:bodyPr spcFirstLastPara="1" wrap="square" lIns="0" tIns="0" rIns="0" bIns="0" anchor="t" anchorCtr="0">
-            <a:normAutofit/>
+            <a:normAutofit fontScale="85000" lnSpcReduction="10000"/>
           </a:bodyPr>
           <a:lstStyle/>
           <a:p>
@@ -2485,6 +2485,61 @@
             </a:r>
           </a:p>
           <a:p>
+            <a:pPr marL="171450" indent="-171450">
+              <a:lnSpc>
+                <a:spcPct val="120000"/>
+              </a:lnSpc>
+              <a:spcAft>
+                <a:spcPts val="600"/>
+              </a:spcAft>
+              <a:buClr>
+                <a:srgbClr val="F7931E"/>
+              </a:buClr>
+              <a:buBlip>
+                <a:blip>
+                  <a:extLst>
+                    <a:ext uri="{96DAC541-7B7A-43D3-8B79-37D633B846F1}">
+                      <asvg:svgBlip xmlns:asvg="http://schemas.microsoft.com/office/drawing/2016/SVG/main" r:embed="rId3"/>
+                    </a:ext>
+                  </a:extLst>
+                </a:blip>
+              </a:buBlip>
+              <a:defRPr/>
+            </a:pPr>
+            <a:r>
+              <a:rPr lang="en-GB" sz="850" b="1" dirty="0">
+                <a:solidFill>
+                  <a:schemeClr val="accent1">
+                    <a:lumMod val="50000"/>
+                  </a:schemeClr>
+                </a:solidFill>
+                <a:uFill>
+                  <a:solidFill>
+                    <a:srgbClr val="000000"/>
+                  </a:solidFill>
+                </a:uFill>
+                <a:ea typeface="Arial Unicode MS" panose="020B0604020202020204" pitchFamily="34" charset="-128"/>
+              </a:rPr>
+              <a:t>{{ENGAGEMENT_4_COMPANY}} </a:t>
+            </a:r>
+            <a:r>
+              <a:rPr lang="en-GB" sz="850" dirty="0">
+                <a:solidFill>
+                  <a:schemeClr val="accent1">
+                    <a:lumMod val="50000"/>
+                  </a:schemeClr>
+                </a:solidFill>
+                <a:uFill>
+                  <a:solidFill>
+                    <a:srgbClr val="000000"/>
+                  </a:solidFill>
+                </a:uFill>
+                <a:ea typeface="Arial Unicode MS" panose="020B0604020202020204" pitchFamily="34" charset="-128"/>
+              </a:rPr>
+              <a:t>– {{ENGAGEMENT_4_DETAIL}}</a:t>
+            </a:r>
+          </a:p>
+          <a:p>
             <a:pPr lvl="0">
               <a:lnSpc>
                 <a:spcPct val="120000"/>
@@ -2542,7 +2597,7 @@
         </p:spPr>
         <p:txBody>
           <a:bodyPr spcFirstLastPara="1" wrap="square" lIns="0" tIns="0" rIns="0" bIns="0" anchor="t" anchorCtr="0">
-            <a:normAutofit/>
+            <a:normAutofit fontScale="90000" lnSpcReduction="10000"/>
           </a:bodyPr>
           <a:lstStyle/>
           <a:p>

--- a/templates/Advisor_Profile_Template_DocGen.pptx
+++ b/templates/Advisor_Profile_Template_DocGen.pptx
@@ -2253,7 +2253,7 @@
         </p:spPr>
         <p:txBody>
           <a:bodyPr spcFirstLastPara="1" wrap="square" lIns="0" tIns="0" rIns="0" bIns="0" anchor="t" anchorCtr="0">
-            <a:normAutofit/>
+            <a:normAutofit fontScale="94000" lnSpcReduction="0"/>
           </a:bodyPr>
           <a:lstStyle/>
           <a:p>
@@ -2314,7 +2314,7 @@
         </p:spPr>
         <p:txBody>
           <a:bodyPr spcFirstLastPara="1" wrap="square" lIns="0" tIns="0" rIns="0" bIns="0" anchor="t" anchorCtr="0">
-            <a:normAutofit fontScale="85000" lnSpcReduction="10000"/>
+            <a:normAutofit fontScale="94000" lnSpcReduction="5000"/>
           </a:bodyPr>
           <a:lstStyle/>
           <a:p>

--- a/templates/Advisor_Profile_Template_DocGen.pptx
+++ b/templates/Advisor_Profile_Template_DocGen.pptx
@@ -2253,7 +2253,7 @@
         </p:spPr>
         <p:txBody>
           <a:bodyPr spcFirstLastPara="1" wrap="square" lIns="0" tIns="0" rIns="0" bIns="0" anchor="t" anchorCtr="0">
-            <a:normAutofit fontScale="94000" lnSpcReduction="0"/>
+            <a:normAutofit fontScale="100000" lnSpcReduction="0"/>
           </a:bodyPr>
           <a:lstStyle/>
           <a:p>
@@ -2314,7 +2314,7 @@
         </p:spPr>
         <p:txBody>
           <a:bodyPr spcFirstLastPara="1" wrap="square" lIns="0" tIns="0" rIns="0" bIns="0" anchor="t" anchorCtr="0">
-            <a:normAutofit fontScale="94000" lnSpcReduction="5000"/>
+            <a:normAutofit fontScale="100000" lnSpcReduction="0"/>
           </a:bodyPr>
           <a:lstStyle/>
           <a:p>
@@ -2597,7 +2597,7 @@
         </p:spPr>
         <p:txBody>
           <a:bodyPr spcFirstLastPara="1" wrap="square" lIns="0" tIns="0" rIns="0" bIns="0" anchor="t" anchorCtr="0">
-            <a:normAutofit fontScale="90000" lnSpcReduction="10000"/>
+            <a:normAutofit fontScale="100000" lnSpcReduction="0"/>
           </a:bodyPr>
           <a:lstStyle/>
           <a:p>
@@ -2807,7 +2807,7 @@
         </p:spPr>
         <p:txBody>
           <a:bodyPr wrap="square" lIns="0" tIns="0" rIns="0" bIns="0" rtlCol="0">
-            <a:normAutofit/>
+            <a:normAutofit fontScale="95238" lnSpcReduction="0"/>
           </a:bodyPr>
           <a:lstStyle/>
           <a:p>
